--- a/03_carrire/ポートフォリオ/日置俊行_ポートフォリオ.pptx
+++ b/03_carrire/ポートフォリオ/日置俊行_ポートフォリオ.pptx
@@ -1528,6 +1528,43 @@
           <a:chExt cx="0" cy="0"/>
         </a:xfrm>
       </p:grpSpPr>
+      <p:cxnSp>
+        <p:nvCxnSpPr>
+          <p:cNvPr id="33" name="Connector 32"/>
+          <p:cNvCxnSpPr/>
+          <p:nvPr/>
+        </p:nvCxnSpPr>
+        <p:spPr>
+          <a:xfrm>
+            <a:off x="914400" y="2039112"/>
+            <a:ext cx="0" cy="3977640"/>
+          </a:xfrm>
+          <a:prstGeom prst="line">
+            <a:avLst/>
+          </a:prstGeom>
+          <a:ln w="19050">
+            <a:solidFill>
+              <a:srgbClr val="C9A227">
+                <a:alpha val="35000"/>
+              </a:srgbClr>
+            </a:solidFill>
+          </a:ln>
+        </p:spPr>
+        <p:style>
+          <a:lnRef idx="2">
+            <a:schemeClr val="accent1"/>
+          </a:lnRef>
+          <a:fillRef idx="0">
+            <a:schemeClr val="accent1"/>
+          </a:fillRef>
+          <a:effectRef idx="1">
+            <a:schemeClr val="accent1"/>
+          </a:effectRef>
+          <a:fontRef idx="minor">
+            <a:schemeClr val="tx1"/>
+          </a:fontRef>
+        </p:style>
+      </p:cxnSp>
       <p:sp>
         <p:nvSpPr>
           <p:cNvPr id="2" name="Text 0"/>
@@ -1592,7 +1629,7 @@
               <a:buNone/>
             </a:pPr>
             <a:r>
-              <a:rPr lang="en-US" sz="1250" dirty="0">
+              <a:rPr lang="en-US" sz="1400" dirty="0">
                 <a:solidFill>
                   <a:srgbClr val="6B7280"/>
                 </a:solidFill>
@@ -1625,6 +1662,10 @@
           </a:solidFill>
           <a:ln/>
         </p:spPr>
+        <p:txBody>
+          <a:bodyPr/>
+          <a:p/>
+        </p:txBody>
       </p:sp>
       <p:sp>
         <p:nvSpPr>
@@ -1690,7 +1731,7 @@
               <a:buNone/>
             </a:pPr>
             <a:r>
-              <a:rPr lang="en-US" sz="1400" b="1" dirty="0">
+              <a:rPr lang="en-US" sz="1500" b="1" dirty="0">
                 <a:solidFill>
                   <a:srgbClr val="1E2761"/>
                 </a:solidFill>
@@ -1729,7 +1770,7 @@
               <a:buNone/>
             </a:pPr>
             <a:r>
-              <a:rPr lang="en-US" sz="1350" dirty="0">
+              <a:rPr lang="en-US" sz="1550" dirty="0">
                 <a:solidFill>
                   <a:srgbClr val="22262F"/>
                 </a:solidFill>
@@ -1765,6 +1806,10 @@
             <a:prstDash val="solid"/>
           </a:ln>
         </p:spPr>
+        <p:txBody>
+          <a:bodyPr/>
+          <a:p/>
+        </p:txBody>
       </p:sp>
       <p:sp>
         <p:nvSpPr>
@@ -1785,6 +1830,10 @@
           </a:solidFill>
           <a:ln/>
         </p:spPr>
+        <p:txBody>
+          <a:bodyPr/>
+          <a:p/>
+        </p:txBody>
       </p:sp>
       <p:sp>
         <p:nvSpPr>
@@ -1850,7 +1899,7 @@
               <a:buNone/>
             </a:pPr>
             <a:r>
-              <a:rPr lang="en-US" sz="1400" b="1" dirty="0">
+              <a:rPr lang="en-US" sz="1500" b="1" dirty="0">
                 <a:solidFill>
                   <a:srgbClr val="1E2761"/>
                 </a:solidFill>
@@ -1889,7 +1938,7 @@
               <a:buNone/>
             </a:pPr>
             <a:r>
-              <a:rPr lang="en-US" sz="1350" dirty="0">
+              <a:rPr lang="en-US" sz="1550" dirty="0">
                 <a:solidFill>
                   <a:srgbClr val="22262F"/>
                 </a:solidFill>
@@ -1925,6 +1974,10 @@
             <a:prstDash val="solid"/>
           </a:ln>
         </p:spPr>
+        <p:txBody>
+          <a:bodyPr/>
+          <a:p/>
+        </p:txBody>
       </p:sp>
       <p:sp>
         <p:nvSpPr>
@@ -1945,6 +1998,10 @@
           </a:solidFill>
           <a:ln/>
         </p:spPr>
+        <p:txBody>
+          <a:bodyPr/>
+          <a:p/>
+        </p:txBody>
       </p:sp>
       <p:sp>
         <p:nvSpPr>
@@ -2010,7 +2067,7 @@
               <a:buNone/>
             </a:pPr>
             <a:r>
-              <a:rPr lang="en-US" sz="1400" b="1" dirty="0">
+              <a:rPr lang="en-US" sz="1500" b="1" dirty="0">
                 <a:solidFill>
                   <a:srgbClr val="1E2761"/>
                 </a:solidFill>
@@ -2049,7 +2106,7 @@
               <a:buNone/>
             </a:pPr>
             <a:r>
-              <a:rPr lang="en-US" sz="1350" dirty="0">
+              <a:rPr lang="en-US" sz="1550" dirty="0">
                 <a:solidFill>
                   <a:srgbClr val="22262F"/>
                 </a:solidFill>
@@ -2085,6 +2142,10 @@
             <a:prstDash val="solid"/>
           </a:ln>
         </p:spPr>
+        <p:txBody>
+          <a:bodyPr/>
+          <a:p/>
+        </p:txBody>
       </p:sp>
       <p:sp>
         <p:nvSpPr>
@@ -2105,6 +2166,10 @@
           </a:solidFill>
           <a:ln/>
         </p:spPr>
+        <p:txBody>
+          <a:bodyPr/>
+          <a:p/>
+        </p:txBody>
       </p:sp>
       <p:sp>
         <p:nvSpPr>
@@ -2170,7 +2235,7 @@
               <a:buNone/>
             </a:pPr>
             <a:r>
-              <a:rPr lang="en-US" sz="1400" b="1" dirty="0">
+              <a:rPr lang="en-US" sz="1500" b="1" dirty="0">
                 <a:solidFill>
                   <a:srgbClr val="1E2761"/>
                 </a:solidFill>
@@ -2209,7 +2274,7 @@
               <a:buNone/>
             </a:pPr>
             <a:r>
-              <a:rPr lang="en-US" sz="1350" dirty="0">
+              <a:rPr lang="en-US" sz="1550" dirty="0">
                 <a:solidFill>
                   <a:srgbClr val="22262F"/>
                 </a:solidFill>
@@ -2245,6 +2310,10 @@
             <a:prstDash val="solid"/>
           </a:ln>
         </p:spPr>
+        <p:txBody>
+          <a:bodyPr/>
+          <a:p/>
+        </p:txBody>
       </p:sp>
       <p:sp>
         <p:nvSpPr>
@@ -2265,6 +2334,10 @@
           </a:solidFill>
           <a:ln/>
         </p:spPr>
+        <p:txBody>
+          <a:bodyPr/>
+          <a:p/>
+        </p:txBody>
       </p:sp>
       <p:sp>
         <p:nvSpPr>
@@ -2330,7 +2403,7 @@
               <a:buNone/>
             </a:pPr>
             <a:r>
-              <a:rPr lang="en-US" sz="1400" b="1" dirty="0">
+              <a:rPr lang="en-US" sz="1500" b="1" dirty="0">
                 <a:solidFill>
                   <a:srgbClr val="1E2761"/>
                 </a:solidFill>
@@ -2369,7 +2442,7 @@
               <a:buNone/>
             </a:pPr>
             <a:r>
-              <a:rPr lang="en-US" sz="1350" dirty="0">
+              <a:rPr lang="en-US" sz="1550" dirty="0">
                 <a:solidFill>
                   <a:srgbClr val="22262F"/>
                 </a:solidFill>
@@ -2405,6 +2478,10 @@
             <a:prstDash val="solid"/>
           </a:ln>
         </p:spPr>
+        <p:txBody>
+          <a:bodyPr/>
+          <a:p/>
+        </p:txBody>
       </p:sp>
       <p:sp>
         <p:nvSpPr>
@@ -2425,6 +2502,10 @@
           </a:solidFill>
           <a:ln/>
         </p:spPr>
+        <p:txBody>
+          <a:bodyPr/>
+          <a:p/>
+        </p:txBody>
       </p:sp>
       <p:sp>
         <p:nvSpPr>
@@ -2490,7 +2571,7 @@
               <a:buNone/>
             </a:pPr>
             <a:r>
-              <a:rPr lang="en-US" sz="1400" b="1" dirty="0">
+              <a:rPr lang="en-US" sz="1500" b="1" dirty="0">
                 <a:solidFill>
                   <a:srgbClr val="1E2761"/>
                 </a:solidFill>
@@ -2529,7 +2610,7 @@
               <a:buNone/>
             </a:pPr>
             <a:r>
-              <a:rPr lang="en-US" sz="1350" dirty="0">
+              <a:rPr lang="en-US" sz="1550" dirty="0">
                 <a:solidFill>
                   <a:srgbClr val="22262F"/>
                 </a:solidFill>
@@ -2639,7 +2720,7 @@
               <a:buNone/>
             </a:pPr>
             <a:r>
-              <a:rPr lang="en-US" sz="1250" dirty="0">
+              <a:rPr lang="en-US" sz="1400" dirty="0">
                 <a:solidFill>
                   <a:srgbClr val="6B7280"/>
                 </a:solidFill>
@@ -2751,7 +2832,7 @@
               <a:buNone/>
             </a:pPr>
             <a:r>
-              <a:rPr lang="en-US" sz="1800" b="1" dirty="0">
+              <a:rPr lang="en-US" sz="2000" b="1" dirty="0">
                 <a:solidFill>
                   <a:srgbClr val="1E2761"/>
                 </a:solidFill>
@@ -2790,7 +2871,7 @@
               <a:buNone/>
             </a:pPr>
             <a:r>
-              <a:rPr lang="en-US" sz="1200" b="1" dirty="0">
+              <a:rPr lang="en-US" sz="1350" b="1" dirty="0">
                 <a:solidFill>
                   <a:srgbClr val="C9A227"/>
                 </a:solidFill>
@@ -2836,7 +2917,7 @@
               <a:buChar char="●"/>
             </a:pPr>
             <a:r>
-              <a:rPr lang="en-US" sz="1300" dirty="0">
+              <a:rPr lang="en-US" sz="1550" dirty="0">
                 <a:solidFill>
                   <a:srgbClr val="22262F"/>
                 </a:solidFill>
@@ -2860,7 +2941,7 @@
               <a:buChar char="●"/>
             </a:pPr>
             <a:r>
-              <a:rPr lang="en-US" sz="1300" dirty="0">
+              <a:rPr lang="en-US" sz="1550" dirty="0">
                 <a:solidFill>
                   <a:srgbClr val="22262F"/>
                 </a:solidFill>
@@ -2972,7 +3053,7 @@
               <a:buNone/>
             </a:pPr>
             <a:r>
-              <a:rPr lang="en-US" sz="1800" b="1" dirty="0">
+              <a:rPr lang="en-US" sz="2000" b="1" dirty="0">
                 <a:solidFill>
                   <a:srgbClr val="1E2761"/>
                 </a:solidFill>
@@ -3011,7 +3092,7 @@
               <a:buNone/>
             </a:pPr>
             <a:r>
-              <a:rPr lang="en-US" sz="1200" b="1" dirty="0">
+              <a:rPr lang="en-US" sz="1350" b="1" dirty="0">
                 <a:solidFill>
                   <a:srgbClr val="C9A227"/>
                 </a:solidFill>
@@ -3057,7 +3138,7 @@
               <a:buChar char="●"/>
             </a:pPr>
             <a:r>
-              <a:rPr lang="en-US" sz="1300" dirty="0">
+              <a:rPr lang="en-US" sz="1550" dirty="0">
                 <a:solidFill>
                   <a:srgbClr val="22262F"/>
                 </a:solidFill>
@@ -3081,7 +3162,7 @@
               <a:buChar char="●"/>
             </a:pPr>
             <a:r>
-              <a:rPr lang="en-US" sz="1300" dirty="0">
+              <a:rPr lang="en-US" sz="1550" dirty="0">
                 <a:solidFill>
                   <a:srgbClr val="22262F"/>
                 </a:solidFill>
@@ -3092,6 +3173,98 @@
               <a:t>見積・原価計算システム等、社内システムの内製化を伴走支援</a:t>
             </a:r>
             <a:endParaRPr lang="en-US" sz="1300" dirty="0"/>
+          </a:p>
+        </p:txBody>
+      </p:sp>
+      <p:sp>
+        <p:nvSpPr>
+          <p:cNvPr id="16" name="Oval 15"/>
+          <p:cNvSpPr/>
+          <p:nvPr/>
+        </p:nvSpPr>
+        <p:spPr>
+          <a:xfrm>
+            <a:off x="10698480" y="5760720"/>
+            <a:ext cx="2377440" cy="2377440"/>
+          </a:xfrm>
+          <a:prstGeom prst="ellipse">
+            <a:avLst/>
+          </a:prstGeom>
+          <a:noFill/>
+          <a:ln w="15875">
+            <a:solidFill>
+              <a:srgbClr val="1E2761">
+                <a:alpha val="10000"/>
+              </a:srgbClr>
+            </a:solidFill>
+          </a:ln>
+          <a:effectLst/>
+        </p:spPr>
+        <p:style>
+          <a:lnRef idx="1">
+            <a:schemeClr val="accent1"/>
+          </a:lnRef>
+          <a:fillRef idx="3">
+            <a:schemeClr val="accent1"/>
+          </a:fillRef>
+          <a:effectRef idx="2">
+            <a:schemeClr val="accent1"/>
+          </a:effectRef>
+          <a:fontRef idx="minor">
+            <a:schemeClr val="lt1"/>
+          </a:fontRef>
+        </p:style>
+        <p:txBody>
+          <a:bodyPr rtlCol="0" anchor="ctr"/>
+          <a:lstStyle/>
+          <a:p>
+            <a:pPr algn="ctr"/>
+          </a:p>
+        </p:txBody>
+      </p:sp>
+      <p:sp>
+        <p:nvSpPr>
+          <p:cNvPr id="17" name="Oval 16"/>
+          <p:cNvSpPr/>
+          <p:nvPr/>
+        </p:nvSpPr>
+        <p:spPr>
+          <a:xfrm>
+            <a:off x="11109960" y="6172200"/>
+            <a:ext cx="1554480" cy="1554480"/>
+          </a:xfrm>
+          <a:prstGeom prst="ellipse">
+            <a:avLst/>
+          </a:prstGeom>
+          <a:noFill/>
+          <a:ln w="15875">
+            <a:solidFill>
+              <a:srgbClr val="C9A227">
+                <a:alpha val="35000"/>
+              </a:srgbClr>
+            </a:solidFill>
+          </a:ln>
+          <a:effectLst/>
+        </p:spPr>
+        <p:style>
+          <a:lnRef idx="1">
+            <a:schemeClr val="accent1"/>
+          </a:lnRef>
+          <a:fillRef idx="3">
+            <a:schemeClr val="accent1"/>
+          </a:fillRef>
+          <a:effectRef idx="2">
+            <a:schemeClr val="accent1"/>
+          </a:effectRef>
+          <a:fontRef idx="minor">
+            <a:schemeClr val="lt1"/>
+          </a:fontRef>
+        </p:style>
+        <p:txBody>
+          <a:bodyPr rtlCol="0" anchor="ctr"/>
+          <a:lstStyle/>
+          <a:p>
+            <a:pPr algn="ctr"/>
           </a:p>
         </p:txBody>
       </p:sp>
@@ -3230,7 +3403,7 @@
               <a:buNone/>
             </a:pPr>
             <a:r>
-              <a:rPr lang="en-US" sz="1300" dirty="0">
+              <a:rPr lang="en-US" sz="1400" dirty="0">
                 <a:solidFill>
                   <a:srgbClr val="6B7280"/>
                 </a:solidFill>
@@ -3313,7 +3486,7 @@
               <a:buNone/>
             </a:pPr>
             <a:r>
-              <a:rPr lang="en-US" sz="1600" b="1" dirty="0">
+              <a:rPr lang="en-US" sz="1850" b="1" dirty="0">
                 <a:solidFill>
                   <a:srgbClr val="1E2761"/>
                 </a:solidFill>
@@ -3355,7 +3528,7 @@
               <a:buNone/>
             </a:pPr>
             <a:r>
-              <a:rPr lang="en-US" sz="1250" dirty="0">
+              <a:rPr lang="en-US" sz="1550" dirty="0">
                 <a:solidFill>
                   <a:srgbClr val="22262F"/>
                 </a:solidFill>
@@ -3438,7 +3611,7 @@
               <a:buNone/>
             </a:pPr>
             <a:r>
-              <a:rPr lang="en-US" sz="1600" b="1" dirty="0">
+              <a:rPr lang="en-US" sz="1850" b="1" dirty="0">
                 <a:solidFill>
                   <a:srgbClr val="1E2761"/>
                 </a:solidFill>
@@ -3480,7 +3653,7 @@
               <a:buNone/>
             </a:pPr>
             <a:r>
-              <a:rPr lang="en-US" sz="1250" dirty="0">
+              <a:rPr lang="en-US" sz="1550" dirty="0">
                 <a:solidFill>
                   <a:srgbClr val="22262F"/>
                 </a:solidFill>
@@ -3563,7 +3736,7 @@
               <a:buNone/>
             </a:pPr>
             <a:r>
-              <a:rPr lang="en-US" sz="1600" b="1" dirty="0">
+              <a:rPr lang="en-US" sz="1850" b="1" dirty="0">
                 <a:solidFill>
                   <a:srgbClr val="1E2761"/>
                 </a:solidFill>
@@ -3605,7 +3778,7 @@
               <a:buNone/>
             </a:pPr>
             <a:r>
-              <a:rPr lang="en-US" sz="1250" dirty="0">
+              <a:rPr lang="en-US" sz="1550" dirty="0">
                 <a:solidFill>
                   <a:srgbClr val="22262F"/>
                 </a:solidFill>
@@ -3616,6 +3789,190 @@
               <a:t>Claude Code／Codexで意思決定の背景・経緯をドキュメント化し属人化を防止</a:t>
             </a:r>
             <a:endParaRPr lang="en-US" sz="1250" dirty="0"/>
+          </a:p>
+        </p:txBody>
+      </p:sp>
+      <p:sp>
+        <p:nvSpPr>
+          <p:cNvPr id="17" name="Chevron 16"/>
+          <p:cNvSpPr/>
+          <p:nvPr/>
+        </p:nvSpPr>
+        <p:spPr>
+          <a:xfrm>
+            <a:off x="2697480" y="2542032"/>
+            <a:ext cx="502920" cy="256032"/>
+          </a:xfrm>
+          <a:prstGeom prst="chevron">
+            <a:avLst/>
+          </a:prstGeom>
+          <a:solidFill>
+            <a:srgbClr val="C9A227">
+              <a:alpha val="55000"/>
+            </a:srgbClr>
+          </a:solidFill>
+          <a:ln>
+            <a:noFill/>
+          </a:ln>
+          <a:effectLst/>
+        </p:spPr>
+        <p:style>
+          <a:lnRef idx="1">
+            <a:schemeClr val="accent1"/>
+          </a:lnRef>
+          <a:fillRef idx="3">
+            <a:schemeClr val="accent1"/>
+          </a:fillRef>
+          <a:effectRef idx="2">
+            <a:schemeClr val="accent1"/>
+          </a:effectRef>
+          <a:fontRef idx="minor">
+            <a:schemeClr val="lt1"/>
+          </a:fontRef>
+        </p:style>
+        <p:txBody>
+          <a:bodyPr rtlCol="0" anchor="ctr"/>
+          <a:lstStyle/>
+          <a:p>
+            <a:pPr algn="ctr"/>
+          </a:p>
+        </p:txBody>
+      </p:sp>
+      <p:sp>
+        <p:nvSpPr>
+          <p:cNvPr id="18" name="Chevron 17"/>
+          <p:cNvSpPr/>
+          <p:nvPr/>
+        </p:nvSpPr>
+        <p:spPr>
+          <a:xfrm>
+            <a:off x="6446520" y="2542032"/>
+            <a:ext cx="502920" cy="256032"/>
+          </a:xfrm>
+          <a:prstGeom prst="chevron">
+            <a:avLst/>
+          </a:prstGeom>
+          <a:solidFill>
+            <a:srgbClr val="C9A227">
+              <a:alpha val="55000"/>
+            </a:srgbClr>
+          </a:solidFill>
+          <a:ln>
+            <a:noFill/>
+          </a:ln>
+          <a:effectLst/>
+        </p:spPr>
+        <p:style>
+          <a:lnRef idx="1">
+            <a:schemeClr val="accent1"/>
+          </a:lnRef>
+          <a:fillRef idx="3">
+            <a:schemeClr val="accent1"/>
+          </a:fillRef>
+          <a:effectRef idx="2">
+            <a:schemeClr val="accent1"/>
+          </a:effectRef>
+          <a:fontRef idx="minor">
+            <a:schemeClr val="lt1"/>
+          </a:fontRef>
+        </p:style>
+        <p:txBody>
+          <a:bodyPr rtlCol="0" anchor="ctr"/>
+          <a:lstStyle/>
+          <a:p>
+            <a:pPr algn="ctr"/>
+          </a:p>
+        </p:txBody>
+      </p:sp>
+      <p:sp>
+        <p:nvSpPr>
+          <p:cNvPr id="19" name="Oval 18"/>
+          <p:cNvSpPr/>
+          <p:nvPr/>
+        </p:nvSpPr>
+        <p:spPr>
+          <a:xfrm>
+            <a:off x="10698480" y="5760720"/>
+            <a:ext cx="2377440" cy="2377440"/>
+          </a:xfrm>
+          <a:prstGeom prst="ellipse">
+            <a:avLst/>
+          </a:prstGeom>
+          <a:noFill/>
+          <a:ln w="15875">
+            <a:solidFill>
+              <a:srgbClr val="1E2761">
+                <a:alpha val="10000"/>
+              </a:srgbClr>
+            </a:solidFill>
+          </a:ln>
+          <a:effectLst/>
+        </p:spPr>
+        <p:style>
+          <a:lnRef idx="1">
+            <a:schemeClr val="accent1"/>
+          </a:lnRef>
+          <a:fillRef idx="3">
+            <a:schemeClr val="accent1"/>
+          </a:fillRef>
+          <a:effectRef idx="2">
+            <a:schemeClr val="accent1"/>
+          </a:effectRef>
+          <a:fontRef idx="minor">
+            <a:schemeClr val="lt1"/>
+          </a:fontRef>
+        </p:style>
+        <p:txBody>
+          <a:bodyPr rtlCol="0" anchor="ctr"/>
+          <a:lstStyle/>
+          <a:p>
+            <a:pPr algn="ctr"/>
+          </a:p>
+        </p:txBody>
+      </p:sp>
+      <p:sp>
+        <p:nvSpPr>
+          <p:cNvPr id="20" name="Oval 19"/>
+          <p:cNvSpPr/>
+          <p:nvPr/>
+        </p:nvSpPr>
+        <p:spPr>
+          <a:xfrm>
+            <a:off x="11109960" y="6172200"/>
+            <a:ext cx="1554480" cy="1554480"/>
+          </a:xfrm>
+          <a:prstGeom prst="ellipse">
+            <a:avLst/>
+          </a:prstGeom>
+          <a:noFill/>
+          <a:ln w="15875">
+            <a:solidFill>
+              <a:srgbClr val="C9A227">
+                <a:alpha val="35000"/>
+              </a:srgbClr>
+            </a:solidFill>
+          </a:ln>
+          <a:effectLst/>
+        </p:spPr>
+        <p:style>
+          <a:lnRef idx="1">
+            <a:schemeClr val="accent1"/>
+          </a:lnRef>
+          <a:fillRef idx="3">
+            <a:schemeClr val="accent1"/>
+          </a:fillRef>
+          <a:effectRef idx="2">
+            <a:schemeClr val="accent1"/>
+          </a:effectRef>
+          <a:fontRef idx="minor">
+            <a:schemeClr val="lt1"/>
+          </a:fontRef>
+        </p:style>
+        <p:txBody>
+          <a:bodyPr rtlCol="0" anchor="ctr"/>
+          <a:lstStyle/>
+          <a:p>
+            <a:pPr algn="ctr"/>
           </a:p>
         </p:txBody>
       </p:sp>
@@ -3856,6 +4213,144 @@
               <a:t>静岡県三島市　｜　hioguitar0730@gmail.com</a:t>
             </a:r>
             <a:endParaRPr lang="en-US" sz="1200" dirty="0"/>
+          </a:p>
+        </p:txBody>
+      </p:sp>
+      <p:sp>
+        <p:nvSpPr>
+          <p:cNvPr id="8" name="Oval 7"/>
+          <p:cNvSpPr/>
+          <p:nvPr/>
+        </p:nvSpPr>
+        <p:spPr>
+          <a:xfrm>
+            <a:off x="9692640" y="5394960"/>
+            <a:ext cx="3657600" cy="3657600"/>
+          </a:xfrm>
+          <a:prstGeom prst="ellipse">
+            <a:avLst/>
+          </a:prstGeom>
+          <a:noFill/>
+          <a:ln w="15875">
+            <a:solidFill>
+              <a:srgbClr val="CADCFC">
+                <a:alpha val="55000"/>
+              </a:srgbClr>
+            </a:solidFill>
+          </a:ln>
+          <a:effectLst/>
+        </p:spPr>
+        <p:style>
+          <a:lnRef idx="1">
+            <a:schemeClr val="accent1"/>
+          </a:lnRef>
+          <a:fillRef idx="3">
+            <a:schemeClr val="accent1"/>
+          </a:fillRef>
+          <a:effectRef idx="2">
+            <a:schemeClr val="accent1"/>
+          </a:effectRef>
+          <a:fontRef idx="minor">
+            <a:schemeClr val="lt1"/>
+          </a:fontRef>
+        </p:style>
+        <p:txBody>
+          <a:bodyPr rtlCol="0" anchor="ctr"/>
+          <a:lstStyle/>
+          <a:p>
+            <a:pPr algn="ctr"/>
+          </a:p>
+        </p:txBody>
+      </p:sp>
+      <p:sp>
+        <p:nvSpPr>
+          <p:cNvPr id="9" name="Oval 8"/>
+          <p:cNvSpPr/>
+          <p:nvPr/>
+        </p:nvSpPr>
+        <p:spPr>
+          <a:xfrm>
+            <a:off x="10607040" y="5760720"/>
+            <a:ext cx="2377440" cy="2377440"/>
+          </a:xfrm>
+          <a:prstGeom prst="ellipse">
+            <a:avLst/>
+          </a:prstGeom>
+          <a:noFill/>
+          <a:ln w="15875">
+            <a:solidFill>
+              <a:srgbClr val="CADCFC">
+                <a:alpha val="55000"/>
+              </a:srgbClr>
+            </a:solidFill>
+          </a:ln>
+          <a:effectLst/>
+        </p:spPr>
+        <p:style>
+          <a:lnRef idx="1">
+            <a:schemeClr val="accent1"/>
+          </a:lnRef>
+          <a:fillRef idx="3">
+            <a:schemeClr val="accent1"/>
+          </a:fillRef>
+          <a:effectRef idx="2">
+            <a:schemeClr val="accent1"/>
+          </a:effectRef>
+          <a:fontRef idx="minor">
+            <a:schemeClr val="lt1"/>
+          </a:fontRef>
+        </p:style>
+        <p:txBody>
+          <a:bodyPr rtlCol="0" anchor="ctr"/>
+          <a:lstStyle/>
+          <a:p>
+            <a:pPr algn="ctr"/>
+          </a:p>
+        </p:txBody>
+      </p:sp>
+      <p:sp>
+        <p:nvSpPr>
+          <p:cNvPr id="10" name="Oval 9"/>
+          <p:cNvSpPr/>
+          <p:nvPr/>
+        </p:nvSpPr>
+        <p:spPr>
+          <a:xfrm>
+            <a:off x="11338559" y="5943600"/>
+            <a:ext cx="1463040" cy="1463040"/>
+          </a:xfrm>
+          <a:prstGeom prst="ellipse">
+            <a:avLst/>
+          </a:prstGeom>
+          <a:noFill/>
+          <a:ln w="15875">
+            <a:solidFill>
+              <a:srgbClr val="C9A227">
+                <a:alpha val="100000"/>
+              </a:srgbClr>
+            </a:solidFill>
+          </a:ln>
+          <a:effectLst/>
+        </p:spPr>
+        <p:style>
+          <a:lnRef idx="1">
+            <a:schemeClr val="accent1"/>
+          </a:lnRef>
+          <a:fillRef idx="3">
+            <a:schemeClr val="accent1"/>
+          </a:fillRef>
+          <a:effectRef idx="2">
+            <a:schemeClr val="accent1"/>
+          </a:effectRef>
+          <a:fontRef idx="minor">
+            <a:schemeClr val="lt1"/>
+          </a:fontRef>
+        </p:style>
+        <p:txBody>
+          <a:bodyPr rtlCol="0" anchor="ctr"/>
+          <a:lstStyle/>
+          <a:p>
+            <a:pPr algn="ctr"/>
           </a:p>
         </p:txBody>
       </p:sp>

--- a/03_carrire/ポートフォリオ/日置俊行_ポートフォリオ.pptx
+++ b/03_carrire/ポートフォリオ/日置俊行_ポートフォリオ.pptx
@@ -2743,7 +2743,7 @@
         <p:spPr>
           <a:xfrm>
             <a:off x="640080" y="1600200"/>
-            <a:ext cx="5074920" cy="4434840"/>
+            <a:ext cx="5074920" cy="5065776"/>
           </a:xfrm>
           <a:prstGeom prst="roundRect">
             <a:avLst>
@@ -2771,8 +2771,8 @@
         </p:nvSpPr>
         <p:spPr>
           <a:xfrm>
-            <a:off x="1005840" y="1965960"/>
-            <a:ext cx="822960" cy="822960"/>
+            <a:off x="1005840" y="1828800"/>
+            <a:ext cx="1645920" cy="1645920"/>
           </a:xfrm>
           <a:prstGeom prst="ellipse">
             <a:avLst/>
@@ -2799,8 +2799,8 @@
         </p:blipFill>
         <p:spPr>
           <a:xfrm>
-            <a:off x="1207008" y="2167128"/>
-            <a:ext cx="420624" cy="420624"/>
+            <a:off x="1408176" y="2231136"/>
+            <a:ext cx="841248" cy="841248"/>
           </a:xfrm>
           <a:prstGeom prst="rect">
             <a:avLst/>
@@ -2815,8 +2815,8 @@
         </p:nvSpPr>
         <p:spPr>
           <a:xfrm>
-            <a:off x="1005840" y="2971800"/>
-            <a:ext cx="4343400" cy="548640"/>
+            <a:off x="1005840" y="3611879"/>
+            <a:ext cx="4663440" cy="1097280"/>
           </a:xfrm>
           <a:prstGeom prst="rect">
             <a:avLst/>
@@ -2829,10 +2829,13 @@
           <a:lstStyle/>
           <a:p>
             <a:pPr indent="0" marL="0">
+              <a:lnSpc>
+                <a:spcPct val="105000"/>
+              </a:lnSpc>
               <a:buNone/>
             </a:pPr>
             <a:r>
-              <a:rPr lang="en-US" sz="2000" b="1" dirty="0">
+              <a:rPr lang="en-US" sz="4000" b="1" dirty="0">
                 <a:solidFill>
                   <a:srgbClr val="1E2761"/>
                 </a:solidFill>
@@ -2854,8 +2857,8 @@
         </p:nvSpPr>
         <p:spPr>
           <a:xfrm>
-            <a:off x="1005840" y="3474720"/>
-            <a:ext cx="4343400" cy="365760"/>
+            <a:off x="1005840" y="4818888"/>
+            <a:ext cx="4343400" cy="320040"/>
           </a:xfrm>
           <a:prstGeom prst="rect">
             <a:avLst/>
@@ -2893,8 +2896,8 @@
         </p:nvSpPr>
         <p:spPr>
           <a:xfrm>
-            <a:off x="1005840" y="3931920"/>
-            <a:ext cx="4343400" cy="1691640"/>
+            <a:off x="1005840" y="5248655"/>
+            <a:ext cx="4343400" cy="1234440"/>
           </a:xfrm>
           <a:prstGeom prst="rect">
             <a:avLst/>
@@ -2964,7 +2967,7 @@
         <p:spPr>
           <a:xfrm>
             <a:off x="6035040" y="1600200"/>
-            <a:ext cx="5074920" cy="4434840"/>
+            <a:ext cx="5074920" cy="5065776"/>
           </a:xfrm>
           <a:prstGeom prst="roundRect">
             <a:avLst>
@@ -2992,8 +2995,8 @@
         </p:nvSpPr>
         <p:spPr>
           <a:xfrm>
-            <a:off x="6400800" y="1965960"/>
-            <a:ext cx="822960" cy="822960"/>
+            <a:off x="6400800" y="1828800"/>
+            <a:ext cx="1645920" cy="1645920"/>
           </a:xfrm>
           <a:prstGeom prst="ellipse">
             <a:avLst/>
@@ -3020,8 +3023,8 @@
         </p:blipFill>
         <p:spPr>
           <a:xfrm>
-            <a:off x="6601968" y="2167128"/>
-            <a:ext cx="420624" cy="420624"/>
+            <a:off x="6803136" y="2231136"/>
+            <a:ext cx="841248" cy="841248"/>
           </a:xfrm>
           <a:prstGeom prst="rect">
             <a:avLst/>
@@ -3036,8 +3039,8 @@
         </p:nvSpPr>
         <p:spPr>
           <a:xfrm>
-            <a:off x="6400800" y="2971800"/>
-            <a:ext cx="4343400" cy="548640"/>
+            <a:off x="6400800" y="3611879"/>
+            <a:ext cx="4663440" cy="1097280"/>
           </a:xfrm>
           <a:prstGeom prst="rect">
             <a:avLst/>
@@ -3050,10 +3053,13 @@
           <a:lstStyle/>
           <a:p>
             <a:pPr indent="0" marL="0">
+              <a:lnSpc>
+                <a:spcPct val="105000"/>
+              </a:lnSpc>
               <a:buNone/>
             </a:pPr>
             <a:r>
-              <a:rPr lang="en-US" sz="2000" b="1" dirty="0">
+              <a:rPr lang="en-US" sz="4000" b="1" dirty="0">
                 <a:solidFill>
                   <a:srgbClr val="1E2761"/>
                 </a:solidFill>
@@ -3075,8 +3081,8 @@
         </p:nvSpPr>
         <p:spPr>
           <a:xfrm>
-            <a:off x="6400800" y="3474720"/>
-            <a:ext cx="4343400" cy="365760"/>
+            <a:off x="6400800" y="4818888"/>
+            <a:ext cx="4343400" cy="320040"/>
           </a:xfrm>
           <a:prstGeom prst="rect">
             <a:avLst/>
@@ -3114,8 +3120,8 @@
         </p:nvSpPr>
         <p:spPr>
           <a:xfrm>
-            <a:off x="6400800" y="3931920"/>
-            <a:ext cx="4343400" cy="1691640"/>
+            <a:off x="6400800" y="5248655"/>
+            <a:ext cx="4343400" cy="1234440"/>
           </a:xfrm>
           <a:prstGeom prst="rect">
             <a:avLst/>
@@ -3425,8 +3431,8 @@
         </p:nvSpPr>
         <p:spPr>
           <a:xfrm>
-            <a:off x="640080" y="2286000"/>
-            <a:ext cx="777240" cy="777240"/>
+            <a:off x="640080" y="2148840"/>
+            <a:ext cx="1554480" cy="1554480"/>
           </a:xfrm>
           <a:prstGeom prst="ellipse">
             <a:avLst/>
@@ -3453,8 +3459,8 @@
         </p:blipFill>
         <p:spPr>
           <a:xfrm>
-            <a:off x="822960" y="2468880"/>
-            <a:ext cx="411480" cy="411480"/>
+            <a:off x="1005839" y="2514600"/>
+            <a:ext cx="822960" cy="822960"/>
           </a:xfrm>
           <a:prstGeom prst="rect">
             <a:avLst/>
@@ -3469,8 +3475,8 @@
         </p:nvSpPr>
         <p:spPr>
           <a:xfrm>
-            <a:off x="640080" y="3246120"/>
-            <a:ext cx="3429000" cy="685800"/>
+            <a:off x="640080" y="3886200"/>
+            <a:ext cx="3429000" cy="1051560"/>
           </a:xfrm>
           <a:prstGeom prst="rect">
             <a:avLst/>
@@ -3483,10 +3489,13 @@
           <a:lstStyle/>
           <a:p>
             <a:pPr indent="0" marL="0">
+              <a:lnSpc>
+                <a:spcPct val="105000"/>
+              </a:lnSpc>
               <a:buNone/>
             </a:pPr>
             <a:r>
-              <a:rPr lang="en-US" sz="1850" b="1" dirty="0">
+              <a:rPr lang="en-US" sz="3700" b="1" dirty="0">
                 <a:solidFill>
                   <a:srgbClr val="1E2761"/>
                 </a:solidFill>
@@ -3508,8 +3517,8 @@
         </p:nvSpPr>
         <p:spPr>
           <a:xfrm>
-            <a:off x="640080" y="3886200"/>
-            <a:ext cx="3429000" cy="2011680"/>
+            <a:off x="640080" y="5074920"/>
+            <a:ext cx="3429000" cy="1005840"/>
           </a:xfrm>
           <a:prstGeom prst="rect">
             <a:avLst/>
@@ -3550,8 +3559,8 @@
         </p:nvSpPr>
         <p:spPr>
           <a:xfrm>
-            <a:off x="4343400" y="2286000"/>
-            <a:ext cx="777240" cy="777240"/>
+            <a:off x="4343400" y="2148840"/>
+            <a:ext cx="1554480" cy="1554480"/>
           </a:xfrm>
           <a:prstGeom prst="ellipse">
             <a:avLst/>
@@ -3578,8 +3587,8 @@
         </p:blipFill>
         <p:spPr>
           <a:xfrm>
-            <a:off x="4526280" y="2468880"/>
-            <a:ext cx="411480" cy="411480"/>
+            <a:off x="4709160" y="2514600"/>
+            <a:ext cx="822960" cy="822960"/>
           </a:xfrm>
           <a:prstGeom prst="rect">
             <a:avLst/>
@@ -3594,8 +3603,8 @@
         </p:nvSpPr>
         <p:spPr>
           <a:xfrm>
-            <a:off x="4343400" y="3246120"/>
-            <a:ext cx="3429000" cy="685800"/>
+            <a:off x="4343400" y="3886200"/>
+            <a:ext cx="3429000" cy="1051560"/>
           </a:xfrm>
           <a:prstGeom prst="rect">
             <a:avLst/>
@@ -3608,10 +3617,13 @@
           <a:lstStyle/>
           <a:p>
             <a:pPr indent="0" marL="0">
+              <a:lnSpc>
+                <a:spcPct val="105000"/>
+              </a:lnSpc>
               <a:buNone/>
             </a:pPr>
             <a:r>
-              <a:rPr lang="en-US" sz="1850" b="1" dirty="0">
+              <a:rPr lang="en-US" sz="3700" b="1" dirty="0">
                 <a:solidFill>
                   <a:srgbClr val="1E2761"/>
                 </a:solidFill>
@@ -3633,8 +3645,8 @@
         </p:nvSpPr>
         <p:spPr>
           <a:xfrm>
-            <a:off x="4343400" y="3886200"/>
-            <a:ext cx="3429000" cy="2011680"/>
+            <a:off x="4343400" y="5074920"/>
+            <a:ext cx="3429000" cy="1005840"/>
           </a:xfrm>
           <a:prstGeom prst="rect">
             <a:avLst/>
@@ -3675,8 +3687,8 @@
         </p:nvSpPr>
         <p:spPr>
           <a:xfrm>
-            <a:off x="8046720" y="2286000"/>
-            <a:ext cx="777240" cy="777240"/>
+            <a:off x="8046720" y="2148840"/>
+            <a:ext cx="1554480" cy="1554480"/>
           </a:xfrm>
           <a:prstGeom prst="ellipse">
             <a:avLst/>
@@ -3703,8 +3715,8 @@
         </p:blipFill>
         <p:spPr>
           <a:xfrm>
-            <a:off x="8229600" y="2468880"/>
-            <a:ext cx="411480" cy="411480"/>
+            <a:off x="8412480" y="2514600"/>
+            <a:ext cx="822960" cy="822960"/>
           </a:xfrm>
           <a:prstGeom prst="rect">
             <a:avLst/>
@@ -3719,8 +3731,8 @@
         </p:nvSpPr>
         <p:spPr>
           <a:xfrm>
-            <a:off x="8046720" y="3246120"/>
-            <a:ext cx="3429000" cy="685800"/>
+            <a:off x="8046720" y="3886200"/>
+            <a:ext cx="3429000" cy="1051560"/>
           </a:xfrm>
           <a:prstGeom prst="rect">
             <a:avLst/>
@@ -3733,10 +3745,13 @@
           <a:lstStyle/>
           <a:p>
             <a:pPr indent="0" marL="0">
+              <a:lnSpc>
+                <a:spcPct val="105000"/>
+              </a:lnSpc>
               <a:buNone/>
             </a:pPr>
             <a:r>
-              <a:rPr lang="en-US" sz="1850" b="1" dirty="0">
+              <a:rPr lang="en-US" sz="3700" b="1" dirty="0">
                 <a:solidFill>
                   <a:srgbClr val="1E2761"/>
                 </a:solidFill>
@@ -3758,8 +3773,8 @@
         </p:nvSpPr>
         <p:spPr>
           <a:xfrm>
-            <a:off x="8046720" y="3886200"/>
-            <a:ext cx="3429000" cy="2011680"/>
+            <a:off x="8046720" y="5074920"/>
+            <a:ext cx="3429000" cy="1005840"/>
           </a:xfrm>
           <a:prstGeom prst="rect">
             <a:avLst/>
@@ -3800,8 +3815,8 @@
         </p:nvSpPr>
         <p:spPr>
           <a:xfrm>
-            <a:off x="2697480" y="2542032"/>
-            <a:ext cx="502920" cy="256032"/>
+            <a:off x="3017520" y="2779776"/>
+            <a:ext cx="502920" cy="292608"/>
           </a:xfrm>
           <a:prstGeom prst="chevron">
             <a:avLst/>
@@ -3846,8 +3861,8 @@
         </p:nvSpPr>
         <p:spPr>
           <a:xfrm>
-            <a:off x="6446520" y="2542032"/>
-            <a:ext cx="502920" cy="256032"/>
+            <a:off x="6720840" y="2779776"/>
+            <a:ext cx="502920" cy="292608"/>
           </a:xfrm>
           <a:prstGeom prst="chevron">
             <a:avLst/>

--- a/03_carrire/ポートフォリオ/日置俊行_ポートフォリオ.pptx
+++ b/03_carrire/ポートフォリオ/日置俊行_ポートフォリオ.pptx
@@ -2743,7 +2743,7 @@
         <p:spPr>
           <a:xfrm>
             <a:off x="640080" y="1600200"/>
-            <a:ext cx="5074920" cy="5065776"/>
+            <a:ext cx="5074920" cy="4745736"/>
           </a:xfrm>
           <a:prstGeom prst="roundRect">
             <a:avLst>
@@ -2816,7 +2816,7 @@
         <p:spPr>
           <a:xfrm>
             <a:off x="1005840" y="3611879"/>
-            <a:ext cx="4663440" cy="1097280"/>
+            <a:ext cx="4663440" cy="777240"/>
           </a:xfrm>
           <a:prstGeom prst="rect">
             <a:avLst/>
@@ -2835,7 +2835,7 @@
               <a:buNone/>
             </a:pPr>
             <a:r>
-              <a:rPr lang="en-US" sz="4000" b="1" dirty="0">
+              <a:rPr lang="en-US" sz="2600" b="1" dirty="0">
                 <a:solidFill>
                   <a:srgbClr val="1E2761"/>
                 </a:solidFill>
@@ -2857,7 +2857,7 @@
         </p:nvSpPr>
         <p:spPr>
           <a:xfrm>
-            <a:off x="1005840" y="4818888"/>
+            <a:off x="1005840" y="4498848"/>
             <a:ext cx="4343400" cy="320040"/>
           </a:xfrm>
           <a:prstGeom prst="rect">
@@ -2896,7 +2896,7 @@
         </p:nvSpPr>
         <p:spPr>
           <a:xfrm>
-            <a:off x="1005840" y="5248655"/>
+            <a:off x="1005840" y="4928616"/>
             <a:ext cx="4343400" cy="1234440"/>
           </a:xfrm>
           <a:prstGeom prst="rect">
@@ -2967,7 +2967,7 @@
         <p:spPr>
           <a:xfrm>
             <a:off x="6035040" y="1600200"/>
-            <a:ext cx="5074920" cy="5065776"/>
+            <a:ext cx="5074920" cy="4745736"/>
           </a:xfrm>
           <a:prstGeom prst="roundRect">
             <a:avLst>
@@ -3040,7 +3040,7 @@
         <p:spPr>
           <a:xfrm>
             <a:off x="6400800" y="3611879"/>
-            <a:ext cx="4663440" cy="1097280"/>
+            <a:ext cx="4663440" cy="777240"/>
           </a:xfrm>
           <a:prstGeom prst="rect">
             <a:avLst/>
@@ -3059,7 +3059,7 @@
               <a:buNone/>
             </a:pPr>
             <a:r>
-              <a:rPr lang="en-US" sz="4000" b="1" dirty="0">
+              <a:rPr lang="en-US" sz="2600" b="1" dirty="0">
                 <a:solidFill>
                   <a:srgbClr val="1E2761"/>
                 </a:solidFill>
@@ -3081,7 +3081,7 @@
         </p:nvSpPr>
         <p:spPr>
           <a:xfrm>
-            <a:off x="6400800" y="4818888"/>
+            <a:off x="6400800" y="4498848"/>
             <a:ext cx="4343400" cy="320040"/>
           </a:xfrm>
           <a:prstGeom prst="rect">
@@ -3120,7 +3120,7 @@
         </p:nvSpPr>
         <p:spPr>
           <a:xfrm>
-            <a:off x="6400800" y="5248655"/>
+            <a:off x="6400800" y="4928616"/>
             <a:ext cx="4343400" cy="1234440"/>
           </a:xfrm>
           <a:prstGeom prst="rect">
@@ -3476,7 +3476,7 @@
         <p:spPr>
           <a:xfrm>
             <a:off x="640080" y="3886200"/>
-            <a:ext cx="3429000" cy="1051560"/>
+            <a:ext cx="3429000" cy="731520"/>
           </a:xfrm>
           <a:prstGeom prst="rect">
             <a:avLst/>
@@ -3495,7 +3495,7 @@
               <a:buNone/>
             </a:pPr>
             <a:r>
-              <a:rPr lang="en-US" sz="3700" b="1" dirty="0">
+              <a:rPr lang="en-US" sz="2600" b="1" dirty="0">
                 <a:solidFill>
                   <a:srgbClr val="1E2761"/>
                 </a:solidFill>
@@ -3517,7 +3517,7 @@
         </p:nvSpPr>
         <p:spPr>
           <a:xfrm>
-            <a:off x="640080" y="5074920"/>
+            <a:off x="640080" y="4754880"/>
             <a:ext cx="3429000" cy="1005840"/>
           </a:xfrm>
           <a:prstGeom prst="rect">
@@ -3604,7 +3604,7 @@
         <p:spPr>
           <a:xfrm>
             <a:off x="4343400" y="3886200"/>
-            <a:ext cx="3429000" cy="1051560"/>
+            <a:ext cx="3429000" cy="731520"/>
           </a:xfrm>
           <a:prstGeom prst="rect">
             <a:avLst/>
@@ -3623,7 +3623,7 @@
               <a:buNone/>
             </a:pPr>
             <a:r>
-              <a:rPr lang="en-US" sz="3700" b="1" dirty="0">
+              <a:rPr lang="en-US" sz="2600" b="1" dirty="0">
                 <a:solidFill>
                   <a:srgbClr val="1E2761"/>
                 </a:solidFill>
@@ -3645,7 +3645,7 @@
         </p:nvSpPr>
         <p:spPr>
           <a:xfrm>
-            <a:off x="4343400" y="5074920"/>
+            <a:off x="4343400" y="4754880"/>
             <a:ext cx="3429000" cy="1005840"/>
           </a:xfrm>
           <a:prstGeom prst="rect">
@@ -3732,7 +3732,7 @@
         <p:spPr>
           <a:xfrm>
             <a:off x="8046720" y="3886200"/>
-            <a:ext cx="3429000" cy="1051560"/>
+            <a:ext cx="3429000" cy="731520"/>
           </a:xfrm>
           <a:prstGeom prst="rect">
             <a:avLst/>
@@ -3751,7 +3751,7 @@
               <a:buNone/>
             </a:pPr>
             <a:r>
-              <a:rPr lang="en-US" sz="3700" b="1" dirty="0">
+              <a:rPr lang="en-US" sz="2600" b="1" dirty="0">
                 <a:solidFill>
                   <a:srgbClr val="1E2761"/>
                 </a:solidFill>
@@ -3773,7 +3773,7 @@
         </p:nvSpPr>
         <p:spPr>
           <a:xfrm>
-            <a:off x="8046720" y="5074920"/>
+            <a:off x="8046720" y="4754880"/>
             <a:ext cx="3429000" cy="1005840"/>
           </a:xfrm>
           <a:prstGeom prst="rect">
